--- a/宣道詩/(宣道詩11)我每時刻要主.pptx
+++ b/宣道詩/(宣道詩11)我每時刻要主.pptx
@@ -171,7 +171,7 @@
           <a:lstStyle/>
           <a:p>
             <a:r>
-              <a:rPr lang="en-US" altLang="zh-TW" smtClean="0"/>
+              <a:rPr lang="en-US" altLang="zh-TW"/>
               <a:t>Click to edit Master title style</a:t>
             </a:r>
             <a:endParaRPr lang="zh-TW" altLang="en-US"/>
@@ -290,7 +290,7 @@
           </a:lstStyle>
           <a:p>
             <a:r>
-              <a:rPr lang="en-US" altLang="zh-TW" smtClean="0"/>
+              <a:rPr lang="en-US" altLang="zh-TW"/>
               <a:t>Click to edit Master subtitle style</a:t>
             </a:r>
             <a:endParaRPr lang="zh-TW" altLang="en-US"/>
@@ -314,7 +314,7 @@
           <a:p>
             <a:fld id="{CED77B96-F9F7-49A4-8A65-F97968A0E7AB}" type="datetimeFigureOut">
               <a:rPr lang="zh-TW" altLang="en-US" smtClean="0"/>
-              <a:t>2021/6/24</a:t>
+              <a:t>2024/6/22</a:t>
             </a:fld>
             <a:endParaRPr lang="zh-TW" altLang="en-US"/>
           </a:p>
@@ -408,7 +408,7 @@
           <a:lstStyle/>
           <a:p>
             <a:r>
-              <a:rPr lang="en-US" altLang="zh-TW" smtClean="0"/>
+              <a:rPr lang="en-US" altLang="zh-TW"/>
               <a:t>Click to edit Master title style</a:t>
             </a:r>
             <a:endParaRPr lang="zh-TW" altLang="en-US"/>
@@ -432,35 +432,35 @@
           <a:p>
             <a:pPr lvl="0"/>
             <a:r>
-              <a:rPr lang="en-US" altLang="zh-TW" smtClean="0"/>
+              <a:rPr lang="en-US" altLang="zh-TW"/>
               <a:t>Edit Master text styles</a:t>
             </a:r>
           </a:p>
           <a:p>
             <a:pPr lvl="1"/>
             <a:r>
-              <a:rPr lang="en-US" altLang="zh-TW" smtClean="0"/>
+              <a:rPr lang="en-US" altLang="zh-TW"/>
               <a:t>Second level</a:t>
             </a:r>
           </a:p>
           <a:p>
             <a:pPr lvl="2"/>
             <a:r>
-              <a:rPr lang="en-US" altLang="zh-TW" smtClean="0"/>
+              <a:rPr lang="en-US" altLang="zh-TW"/>
               <a:t>Third level</a:t>
             </a:r>
           </a:p>
           <a:p>
             <a:pPr lvl="3"/>
             <a:r>
-              <a:rPr lang="en-US" altLang="zh-TW" smtClean="0"/>
+              <a:rPr lang="en-US" altLang="zh-TW"/>
               <a:t>Fourth level</a:t>
             </a:r>
           </a:p>
           <a:p>
             <a:pPr lvl="4"/>
             <a:r>
-              <a:rPr lang="en-US" altLang="zh-TW" smtClean="0"/>
+              <a:rPr lang="en-US" altLang="zh-TW"/>
               <a:t>Fifth level</a:t>
             </a:r>
             <a:endParaRPr lang="zh-TW" altLang="en-US"/>
@@ -484,7 +484,7 @@
           <a:p>
             <a:fld id="{CED77B96-F9F7-49A4-8A65-F97968A0E7AB}" type="datetimeFigureOut">
               <a:rPr lang="zh-TW" altLang="en-US" smtClean="0"/>
-              <a:t>2021/6/24</a:t>
+              <a:t>2024/6/22</a:t>
             </a:fld>
             <a:endParaRPr lang="zh-TW" altLang="en-US"/>
           </a:p>
@@ -583,7 +583,7 @@
           <a:lstStyle/>
           <a:p>
             <a:r>
-              <a:rPr lang="en-US" altLang="zh-TW" smtClean="0"/>
+              <a:rPr lang="en-US" altLang="zh-TW"/>
               <a:t>Click to edit Master title style</a:t>
             </a:r>
             <a:endParaRPr lang="zh-TW" altLang="en-US"/>
@@ -612,35 +612,35 @@
           <a:p>
             <a:pPr lvl="0"/>
             <a:r>
-              <a:rPr lang="en-US" altLang="zh-TW" smtClean="0"/>
+              <a:rPr lang="en-US" altLang="zh-TW"/>
               <a:t>Edit Master text styles</a:t>
             </a:r>
           </a:p>
           <a:p>
             <a:pPr lvl="1"/>
             <a:r>
-              <a:rPr lang="en-US" altLang="zh-TW" smtClean="0"/>
+              <a:rPr lang="en-US" altLang="zh-TW"/>
               <a:t>Second level</a:t>
             </a:r>
           </a:p>
           <a:p>
             <a:pPr lvl="2"/>
             <a:r>
-              <a:rPr lang="en-US" altLang="zh-TW" smtClean="0"/>
+              <a:rPr lang="en-US" altLang="zh-TW"/>
               <a:t>Third level</a:t>
             </a:r>
           </a:p>
           <a:p>
             <a:pPr lvl="3"/>
             <a:r>
-              <a:rPr lang="en-US" altLang="zh-TW" smtClean="0"/>
+              <a:rPr lang="en-US" altLang="zh-TW"/>
               <a:t>Fourth level</a:t>
             </a:r>
           </a:p>
           <a:p>
             <a:pPr lvl="4"/>
             <a:r>
-              <a:rPr lang="en-US" altLang="zh-TW" smtClean="0"/>
+              <a:rPr lang="en-US" altLang="zh-TW"/>
               <a:t>Fifth level</a:t>
             </a:r>
             <a:endParaRPr lang="zh-TW" altLang="en-US"/>
@@ -664,7 +664,7 @@
           <a:p>
             <a:fld id="{CED77B96-F9F7-49A4-8A65-F97968A0E7AB}" type="datetimeFigureOut">
               <a:rPr lang="zh-TW" altLang="en-US" smtClean="0"/>
-              <a:t>2021/6/24</a:t>
+              <a:t>2024/6/22</a:t>
             </a:fld>
             <a:endParaRPr lang="zh-TW" altLang="en-US"/>
           </a:p>
@@ -758,7 +758,7 @@
           <a:lstStyle/>
           <a:p>
             <a:r>
-              <a:rPr lang="en-US" altLang="zh-TW" smtClean="0"/>
+              <a:rPr lang="en-US" altLang="zh-TW"/>
               <a:t>Click to edit Master title style</a:t>
             </a:r>
             <a:endParaRPr lang="zh-TW" altLang="en-US"/>
@@ -782,35 +782,35 @@
           <a:p>
             <a:pPr lvl="0"/>
             <a:r>
-              <a:rPr lang="en-US" altLang="zh-TW" smtClean="0"/>
+              <a:rPr lang="en-US" altLang="zh-TW"/>
               <a:t>Edit Master text styles</a:t>
             </a:r>
           </a:p>
           <a:p>
             <a:pPr lvl="1"/>
             <a:r>
-              <a:rPr lang="en-US" altLang="zh-TW" smtClean="0"/>
+              <a:rPr lang="en-US" altLang="zh-TW"/>
               <a:t>Second level</a:t>
             </a:r>
           </a:p>
           <a:p>
             <a:pPr lvl="2"/>
             <a:r>
-              <a:rPr lang="en-US" altLang="zh-TW" smtClean="0"/>
+              <a:rPr lang="en-US" altLang="zh-TW"/>
               <a:t>Third level</a:t>
             </a:r>
           </a:p>
           <a:p>
             <a:pPr lvl="3"/>
             <a:r>
-              <a:rPr lang="en-US" altLang="zh-TW" smtClean="0"/>
+              <a:rPr lang="en-US" altLang="zh-TW"/>
               <a:t>Fourth level</a:t>
             </a:r>
           </a:p>
           <a:p>
             <a:pPr lvl="4"/>
             <a:r>
-              <a:rPr lang="en-US" altLang="zh-TW" smtClean="0"/>
+              <a:rPr lang="en-US" altLang="zh-TW"/>
               <a:t>Fifth level</a:t>
             </a:r>
             <a:endParaRPr lang="zh-TW" altLang="en-US"/>
@@ -834,7 +834,7 @@
           <a:p>
             <a:fld id="{CED77B96-F9F7-49A4-8A65-F97968A0E7AB}" type="datetimeFigureOut">
               <a:rPr lang="zh-TW" altLang="en-US" smtClean="0"/>
-              <a:t>2021/6/24</a:t>
+              <a:t>2024/6/22</a:t>
             </a:fld>
             <a:endParaRPr lang="zh-TW" altLang="en-US"/>
           </a:p>
@@ -937,7 +937,7 @@
           </a:lstStyle>
           <a:p>
             <a:r>
-              <a:rPr lang="en-US" altLang="zh-TW" smtClean="0"/>
+              <a:rPr lang="en-US" altLang="zh-TW"/>
               <a:t>Click to edit Master title style</a:t>
             </a:r>
             <a:endParaRPr lang="zh-TW" altLang="en-US"/>
@@ -1057,7 +1057,7 @@
           <a:p>
             <a:pPr lvl="0"/>
             <a:r>
-              <a:rPr lang="en-US" altLang="zh-TW" smtClean="0"/>
+              <a:rPr lang="en-US" altLang="zh-TW"/>
               <a:t>Edit Master text styles</a:t>
             </a:r>
           </a:p>
@@ -1080,7 +1080,7 @@
           <a:p>
             <a:fld id="{CED77B96-F9F7-49A4-8A65-F97968A0E7AB}" type="datetimeFigureOut">
               <a:rPr lang="zh-TW" altLang="en-US" smtClean="0"/>
-              <a:t>2021/6/24</a:t>
+              <a:t>2024/6/22</a:t>
             </a:fld>
             <a:endParaRPr lang="zh-TW" altLang="en-US"/>
           </a:p>
@@ -1174,7 +1174,7 @@
           <a:lstStyle/>
           <a:p>
             <a:r>
-              <a:rPr lang="en-US" altLang="zh-TW" smtClean="0"/>
+              <a:rPr lang="en-US" altLang="zh-TW"/>
               <a:t>Click to edit Master title style</a:t>
             </a:r>
             <a:endParaRPr lang="zh-TW" altLang="en-US"/>
@@ -1231,35 +1231,35 @@
           <a:p>
             <a:pPr lvl="0"/>
             <a:r>
-              <a:rPr lang="en-US" altLang="zh-TW" smtClean="0"/>
+              <a:rPr lang="en-US" altLang="zh-TW"/>
               <a:t>Edit Master text styles</a:t>
             </a:r>
           </a:p>
           <a:p>
             <a:pPr lvl="1"/>
             <a:r>
-              <a:rPr lang="en-US" altLang="zh-TW" smtClean="0"/>
+              <a:rPr lang="en-US" altLang="zh-TW"/>
               <a:t>Second level</a:t>
             </a:r>
           </a:p>
           <a:p>
             <a:pPr lvl="2"/>
             <a:r>
-              <a:rPr lang="en-US" altLang="zh-TW" smtClean="0"/>
+              <a:rPr lang="en-US" altLang="zh-TW"/>
               <a:t>Third level</a:t>
             </a:r>
           </a:p>
           <a:p>
             <a:pPr lvl="3"/>
             <a:r>
-              <a:rPr lang="en-US" altLang="zh-TW" smtClean="0"/>
+              <a:rPr lang="en-US" altLang="zh-TW"/>
               <a:t>Fourth level</a:t>
             </a:r>
           </a:p>
           <a:p>
             <a:pPr lvl="4"/>
             <a:r>
-              <a:rPr lang="en-US" altLang="zh-TW" smtClean="0"/>
+              <a:rPr lang="en-US" altLang="zh-TW"/>
               <a:t>Fifth level</a:t>
             </a:r>
             <a:endParaRPr lang="zh-TW" altLang="en-US"/>
@@ -1316,35 +1316,35 @@
           <a:p>
             <a:pPr lvl="0"/>
             <a:r>
-              <a:rPr lang="en-US" altLang="zh-TW" smtClean="0"/>
+              <a:rPr lang="en-US" altLang="zh-TW"/>
               <a:t>Edit Master text styles</a:t>
             </a:r>
           </a:p>
           <a:p>
             <a:pPr lvl="1"/>
             <a:r>
-              <a:rPr lang="en-US" altLang="zh-TW" smtClean="0"/>
+              <a:rPr lang="en-US" altLang="zh-TW"/>
               <a:t>Second level</a:t>
             </a:r>
           </a:p>
           <a:p>
             <a:pPr lvl="2"/>
             <a:r>
-              <a:rPr lang="en-US" altLang="zh-TW" smtClean="0"/>
+              <a:rPr lang="en-US" altLang="zh-TW"/>
               <a:t>Third level</a:t>
             </a:r>
           </a:p>
           <a:p>
             <a:pPr lvl="3"/>
             <a:r>
-              <a:rPr lang="en-US" altLang="zh-TW" smtClean="0"/>
+              <a:rPr lang="en-US" altLang="zh-TW"/>
               <a:t>Fourth level</a:t>
             </a:r>
           </a:p>
           <a:p>
             <a:pPr lvl="4"/>
             <a:r>
-              <a:rPr lang="en-US" altLang="zh-TW" smtClean="0"/>
+              <a:rPr lang="en-US" altLang="zh-TW"/>
               <a:t>Fifth level</a:t>
             </a:r>
             <a:endParaRPr lang="zh-TW" altLang="en-US"/>
@@ -1368,7 +1368,7 @@
           <a:p>
             <a:fld id="{CED77B96-F9F7-49A4-8A65-F97968A0E7AB}" type="datetimeFigureOut">
               <a:rPr lang="zh-TW" altLang="en-US" smtClean="0"/>
-              <a:t>2021/6/24</a:t>
+              <a:t>2024/6/22</a:t>
             </a:fld>
             <a:endParaRPr lang="zh-TW" altLang="en-US"/>
           </a:p>
@@ -1466,7 +1466,7 @@
           </a:lstStyle>
           <a:p>
             <a:r>
-              <a:rPr lang="en-US" altLang="zh-TW" smtClean="0"/>
+              <a:rPr lang="en-US" altLang="zh-TW"/>
               <a:t>Click to edit Master title style</a:t>
             </a:r>
             <a:endParaRPr lang="zh-TW" altLang="en-US"/>
@@ -1532,7 +1532,7 @@
           <a:p>
             <a:pPr lvl="0"/>
             <a:r>
-              <a:rPr lang="en-US" altLang="zh-TW" smtClean="0"/>
+              <a:rPr lang="en-US" altLang="zh-TW"/>
               <a:t>Edit Master text styles</a:t>
             </a:r>
           </a:p>
@@ -1588,35 +1588,35 @@
           <a:p>
             <a:pPr lvl="0"/>
             <a:r>
-              <a:rPr lang="en-US" altLang="zh-TW" smtClean="0"/>
+              <a:rPr lang="en-US" altLang="zh-TW"/>
               <a:t>Edit Master text styles</a:t>
             </a:r>
           </a:p>
           <a:p>
             <a:pPr lvl="1"/>
             <a:r>
-              <a:rPr lang="en-US" altLang="zh-TW" smtClean="0"/>
+              <a:rPr lang="en-US" altLang="zh-TW"/>
               <a:t>Second level</a:t>
             </a:r>
           </a:p>
           <a:p>
             <a:pPr lvl="2"/>
             <a:r>
-              <a:rPr lang="en-US" altLang="zh-TW" smtClean="0"/>
+              <a:rPr lang="en-US" altLang="zh-TW"/>
               <a:t>Third level</a:t>
             </a:r>
           </a:p>
           <a:p>
             <a:pPr lvl="3"/>
             <a:r>
-              <a:rPr lang="en-US" altLang="zh-TW" smtClean="0"/>
+              <a:rPr lang="en-US" altLang="zh-TW"/>
               <a:t>Fourth level</a:t>
             </a:r>
           </a:p>
           <a:p>
             <a:pPr lvl="4"/>
             <a:r>
-              <a:rPr lang="en-US" altLang="zh-TW" smtClean="0"/>
+              <a:rPr lang="en-US" altLang="zh-TW"/>
               <a:t>Fifth level</a:t>
             </a:r>
             <a:endParaRPr lang="zh-TW" altLang="en-US"/>
@@ -1682,7 +1682,7 @@
           <a:p>
             <a:pPr lvl="0"/>
             <a:r>
-              <a:rPr lang="en-US" altLang="zh-TW" smtClean="0"/>
+              <a:rPr lang="en-US" altLang="zh-TW"/>
               <a:t>Edit Master text styles</a:t>
             </a:r>
           </a:p>
@@ -1738,35 +1738,35 @@
           <a:p>
             <a:pPr lvl="0"/>
             <a:r>
-              <a:rPr lang="en-US" altLang="zh-TW" smtClean="0"/>
+              <a:rPr lang="en-US" altLang="zh-TW"/>
               <a:t>Edit Master text styles</a:t>
             </a:r>
           </a:p>
           <a:p>
             <a:pPr lvl="1"/>
             <a:r>
-              <a:rPr lang="en-US" altLang="zh-TW" smtClean="0"/>
+              <a:rPr lang="en-US" altLang="zh-TW"/>
               <a:t>Second level</a:t>
             </a:r>
           </a:p>
           <a:p>
             <a:pPr lvl="2"/>
             <a:r>
-              <a:rPr lang="en-US" altLang="zh-TW" smtClean="0"/>
+              <a:rPr lang="en-US" altLang="zh-TW"/>
               <a:t>Third level</a:t>
             </a:r>
           </a:p>
           <a:p>
             <a:pPr lvl="3"/>
             <a:r>
-              <a:rPr lang="en-US" altLang="zh-TW" smtClean="0"/>
+              <a:rPr lang="en-US" altLang="zh-TW"/>
               <a:t>Fourth level</a:t>
             </a:r>
           </a:p>
           <a:p>
             <a:pPr lvl="4"/>
             <a:r>
-              <a:rPr lang="en-US" altLang="zh-TW" smtClean="0"/>
+              <a:rPr lang="en-US" altLang="zh-TW"/>
               <a:t>Fifth level</a:t>
             </a:r>
             <a:endParaRPr lang="zh-TW" altLang="en-US"/>
@@ -1790,7 +1790,7 @@
           <a:p>
             <a:fld id="{CED77B96-F9F7-49A4-8A65-F97968A0E7AB}" type="datetimeFigureOut">
               <a:rPr lang="zh-TW" altLang="en-US" smtClean="0"/>
-              <a:t>2021/6/24</a:t>
+              <a:t>2024/6/22</a:t>
             </a:fld>
             <a:endParaRPr lang="zh-TW" altLang="en-US"/>
           </a:p>
@@ -1884,7 +1884,7 @@
           <a:lstStyle/>
           <a:p>
             <a:r>
-              <a:rPr lang="en-US" altLang="zh-TW" smtClean="0"/>
+              <a:rPr lang="en-US" altLang="zh-TW"/>
               <a:t>Click to edit Master title style</a:t>
             </a:r>
             <a:endParaRPr lang="zh-TW" altLang="en-US"/>
@@ -1908,7 +1908,7 @@
           <a:p>
             <a:fld id="{CED77B96-F9F7-49A4-8A65-F97968A0E7AB}" type="datetimeFigureOut">
               <a:rPr lang="zh-TW" altLang="en-US" smtClean="0"/>
-              <a:t>2021/6/24</a:t>
+              <a:t>2024/6/22</a:t>
             </a:fld>
             <a:endParaRPr lang="zh-TW" altLang="en-US"/>
           </a:p>
@@ -2003,7 +2003,7 @@
           <a:p>
             <a:fld id="{CED77B96-F9F7-49A4-8A65-F97968A0E7AB}" type="datetimeFigureOut">
               <a:rPr lang="zh-TW" altLang="en-US" smtClean="0"/>
-              <a:t>2021/6/24</a:t>
+              <a:t>2024/6/22</a:t>
             </a:fld>
             <a:endParaRPr lang="zh-TW" altLang="en-US"/>
           </a:p>
@@ -2106,7 +2106,7 @@
           </a:lstStyle>
           <a:p>
             <a:r>
-              <a:rPr lang="en-US" altLang="zh-TW" smtClean="0"/>
+              <a:rPr lang="en-US" altLang="zh-TW"/>
               <a:t>Click to edit Master title style</a:t>
             </a:r>
             <a:endParaRPr lang="zh-TW" altLang="en-US"/>
@@ -2163,35 +2163,35 @@
           <a:p>
             <a:pPr lvl="0"/>
             <a:r>
-              <a:rPr lang="en-US" altLang="zh-TW" smtClean="0"/>
+              <a:rPr lang="en-US" altLang="zh-TW"/>
               <a:t>Edit Master text styles</a:t>
             </a:r>
           </a:p>
           <a:p>
             <a:pPr lvl="1"/>
             <a:r>
-              <a:rPr lang="en-US" altLang="zh-TW" smtClean="0"/>
+              <a:rPr lang="en-US" altLang="zh-TW"/>
               <a:t>Second level</a:t>
             </a:r>
           </a:p>
           <a:p>
             <a:pPr lvl="2"/>
             <a:r>
-              <a:rPr lang="en-US" altLang="zh-TW" smtClean="0"/>
+              <a:rPr lang="en-US" altLang="zh-TW"/>
               <a:t>Third level</a:t>
             </a:r>
           </a:p>
           <a:p>
             <a:pPr lvl="3"/>
             <a:r>
-              <a:rPr lang="en-US" altLang="zh-TW" smtClean="0"/>
+              <a:rPr lang="en-US" altLang="zh-TW"/>
               <a:t>Fourth level</a:t>
             </a:r>
           </a:p>
           <a:p>
             <a:pPr lvl="4"/>
             <a:r>
-              <a:rPr lang="en-US" altLang="zh-TW" smtClean="0"/>
+              <a:rPr lang="en-US" altLang="zh-TW"/>
               <a:t>Fifth level</a:t>
             </a:r>
             <a:endParaRPr lang="zh-TW" altLang="en-US"/>
@@ -2257,7 +2257,7 @@
           <a:p>
             <a:pPr lvl="0"/>
             <a:r>
-              <a:rPr lang="en-US" altLang="zh-TW" smtClean="0"/>
+              <a:rPr lang="en-US" altLang="zh-TW"/>
               <a:t>Edit Master text styles</a:t>
             </a:r>
           </a:p>
@@ -2280,7 +2280,7 @@
           <a:p>
             <a:fld id="{CED77B96-F9F7-49A4-8A65-F97968A0E7AB}" type="datetimeFigureOut">
               <a:rPr lang="zh-TW" altLang="en-US" smtClean="0"/>
-              <a:t>2021/6/24</a:t>
+              <a:t>2024/6/22</a:t>
             </a:fld>
             <a:endParaRPr lang="zh-TW" altLang="en-US"/>
           </a:p>
@@ -2383,7 +2383,7 @@
           </a:lstStyle>
           <a:p>
             <a:r>
-              <a:rPr lang="en-US" altLang="zh-TW" smtClean="0"/>
+              <a:rPr lang="en-US" altLang="zh-TW"/>
               <a:t>Click to edit Master title style</a:t>
             </a:r>
             <a:endParaRPr lang="zh-TW" altLang="en-US"/>
@@ -2448,7 +2448,7 @@
           </a:lstStyle>
           <a:p>
             <a:r>
-              <a:rPr lang="en-US" altLang="zh-TW" smtClean="0"/>
+              <a:rPr lang="en-US" altLang="zh-TW"/>
               <a:t>Click icon to add picture</a:t>
             </a:r>
             <a:endParaRPr lang="zh-TW" altLang="en-US"/>
@@ -2514,7 +2514,7 @@
           <a:p>
             <a:pPr lvl="0"/>
             <a:r>
-              <a:rPr lang="en-US" altLang="zh-TW" smtClean="0"/>
+              <a:rPr lang="en-US" altLang="zh-TW"/>
               <a:t>Edit Master text styles</a:t>
             </a:r>
           </a:p>
@@ -2537,7 +2537,7 @@
           <a:p>
             <a:fld id="{CED77B96-F9F7-49A4-8A65-F97968A0E7AB}" type="datetimeFigureOut">
               <a:rPr lang="zh-TW" altLang="en-US" smtClean="0"/>
-              <a:t>2021/6/24</a:t>
+              <a:t>2024/6/22</a:t>
             </a:fld>
             <a:endParaRPr lang="zh-TW" altLang="en-US"/>
           </a:p>
@@ -2651,10 +2651,9 @@
           <a:lstStyle/>
           <a:p>
             <a:r>
-              <a:rPr lang="zh-TW" altLang="en-US" smtClean="0"/>
+              <a:rPr lang="zh-TW" altLang="en-US"/>
               <a:t>按一下以編輯母片標題樣式</a:t>
             </a:r>
-            <a:endParaRPr lang="zh-TW" altLang="en-US"/>
           </a:p>
         </p:txBody>
       </p:sp>
@@ -2685,38 +2684,37 @@
           <a:p>
             <a:pPr lvl="0"/>
             <a:r>
-              <a:rPr lang="zh-TW" altLang="en-US" smtClean="0"/>
+              <a:rPr lang="zh-TW" altLang="en-US"/>
               <a:t>按一下以編輯母片文字樣式</a:t>
             </a:r>
           </a:p>
           <a:p>
             <a:pPr lvl="1"/>
             <a:r>
-              <a:rPr lang="zh-TW" altLang="en-US" smtClean="0"/>
+              <a:rPr lang="zh-TW" altLang="en-US"/>
               <a:t>第二層</a:t>
             </a:r>
           </a:p>
           <a:p>
             <a:pPr lvl="2"/>
             <a:r>
-              <a:rPr lang="zh-TW" altLang="en-US" smtClean="0"/>
+              <a:rPr lang="zh-TW" altLang="en-US"/>
               <a:t>第三層</a:t>
             </a:r>
           </a:p>
           <a:p>
             <a:pPr lvl="3"/>
             <a:r>
-              <a:rPr lang="zh-TW" altLang="en-US" smtClean="0"/>
+              <a:rPr lang="zh-TW" altLang="en-US"/>
               <a:t>第四層</a:t>
             </a:r>
           </a:p>
           <a:p>
             <a:pPr lvl="4"/>
             <a:r>
-              <a:rPr lang="zh-TW" altLang="en-US" smtClean="0"/>
+              <a:rPr lang="zh-TW" altLang="en-US"/>
               <a:t>第五層</a:t>
             </a:r>
-            <a:endParaRPr lang="zh-TW" altLang="en-US"/>
           </a:p>
         </p:txBody>
       </p:sp>
@@ -2755,7 +2753,7 @@
           <a:p>
             <a:fld id="{CED77B96-F9F7-49A4-8A65-F97968A0E7AB}" type="datetimeFigureOut">
               <a:rPr lang="zh-TW" altLang="en-US" smtClean="0"/>
-              <a:t>2021/6/24</a:t>
+              <a:t>2024/6/22</a:t>
             </a:fld>
             <a:endParaRPr lang="zh-TW" altLang="en-US"/>
           </a:p>
@@ -3170,7 +3168,7 @@
               <a:t>宣道詩 </a:t>
             </a:r>
             <a:r>
-              <a:rPr lang="en-US" altLang="zh-CN" sz="5333" b="1" u="sng" dirty="0" smtClean="0">
+              <a:rPr lang="en-US" altLang="zh-CN" sz="5333" b="1" u="sng" dirty="0">
                 <a:solidFill>
                   <a:srgbClr val="000066"/>
                 </a:solidFill>
@@ -3186,23 +3184,6 @@
               </a:rPr>
               <a:t>11</a:t>
             </a:r>
-            <a:r>
-              <a:rPr lang="en-US" altLang="zh-CN" sz="7200" b="1" i="1" dirty="0">
-                <a:solidFill>
-                  <a:srgbClr val="660033"/>
-                </a:solidFill>
-                <a:effectLst>
-                  <a:outerShdw blurRad="38100" dist="38100" dir="2700000" algn="tl">
-                    <a:srgbClr val="000000">
-                      <a:alpha val="43137"/>
-                    </a:srgbClr>
-                  </a:outerShdw>
-                </a:effectLst>
-                <a:latin typeface="微軟正黑體" pitchFamily="34" charset="-120"/>
-                <a:ea typeface="微軟正黑體" pitchFamily="34" charset="-120"/>
-              </a:rPr>
-              <a:t/>
-            </a:r>
             <a:br>
               <a:rPr lang="en-US" altLang="zh-CN" sz="7200" b="1" i="1" dirty="0">
                 <a:solidFill>
@@ -3220,7 +3201,7 @@
               </a:rPr>
             </a:br>
             <a:r>
-              <a:rPr lang="zh-TW" altLang="en-US" sz="8000" b="1" dirty="0" smtClean="0">
+              <a:rPr lang="zh-TW" altLang="en-US" sz="8000" b="1" dirty="0">
                 <a:solidFill>
                   <a:srgbClr val="660033"/>
                 </a:solidFill>
@@ -3234,24 +3215,7 @@
                 <a:latin typeface="微軟正黑體" pitchFamily="34" charset="-120"/>
                 <a:ea typeface="微軟正黑體" pitchFamily="34" charset="-120"/>
               </a:rPr>
-              <a:t>我</a:t>
-            </a:r>
-            <a:r>
-              <a:rPr lang="zh-TW" altLang="en-US" sz="8000" b="1" dirty="0">
-                <a:solidFill>
-                  <a:srgbClr val="660033"/>
-                </a:solidFill>
-                <a:effectLst>
-                  <a:outerShdw blurRad="38100" dist="38100" dir="2700000" algn="tl">
-                    <a:srgbClr val="000000">
-                      <a:alpha val="43137"/>
-                    </a:srgbClr>
-                  </a:outerShdw>
-                </a:effectLst>
-                <a:latin typeface="微軟正黑體" pitchFamily="34" charset="-120"/>
-                <a:ea typeface="微軟正黑體" pitchFamily="34" charset="-120"/>
-              </a:rPr>
-              <a:t>每時刻要主</a:t>
+              <a:t>我每時刻要主</a:t>
             </a:r>
           </a:p>
         </p:txBody>
@@ -3266,13 +3230,6 @@
   <p:clrMapOvr>
     <a:masterClrMapping/>
   </p:clrMapOvr>
-  <p:timing>
-    <p:tnLst>
-      <p:par>
-        <p:cTn id="1" dur="indefinite" restart="never" nodeType="tmRoot"/>
-      </p:par>
-    </p:tnLst>
-  </p:timing>
 </p:sld>
 </file>
 
@@ -3326,8 +3283,13 @@
                 <a:latin typeface="Microsoft JhengHei" pitchFamily="34" charset="-120"/>
                 <a:ea typeface="Microsoft JhengHei" pitchFamily="34" charset="-120"/>
               </a:rPr>
-              <a:t>我每時刻</a:t>
-            </a:r>
+              <a:t>我每時刻要祢  主旨遵行</a:t>
+            </a:r>
+          </a:p>
+          <a:p>
+            <a:pPr algn="ctr">
+              <a:buNone/>
+            </a:pPr>
             <a:r>
               <a:rPr lang="zh-TW" altLang="en-US" sz="6400" b="1" dirty="0">
                 <a:solidFill>
@@ -3336,52 +3298,7 @@
                 <a:latin typeface="Microsoft JhengHei" pitchFamily="34" charset="-120"/>
                 <a:ea typeface="Microsoft JhengHei" pitchFamily="34" charset="-120"/>
               </a:rPr>
-              <a:t>要你  主</a:t>
-            </a:r>
-            <a:r>
-              <a:rPr lang="zh-TW" altLang="en-US" sz="6400" b="1" dirty="0">
-                <a:solidFill>
-                  <a:srgbClr val="660033"/>
-                </a:solidFill>
-                <a:latin typeface="Microsoft JhengHei" pitchFamily="34" charset="-120"/>
-                <a:ea typeface="Microsoft JhengHei" pitchFamily="34" charset="-120"/>
-              </a:rPr>
-              <a:t>旨遵行</a:t>
-            </a:r>
-          </a:p>
-          <a:p>
-            <a:pPr algn="ctr">
-              <a:buNone/>
-            </a:pPr>
-            <a:r>
-              <a:rPr lang="zh-TW" altLang="en-US" sz="6400" b="1" dirty="0">
-                <a:solidFill>
-                  <a:srgbClr val="660033"/>
-                </a:solidFill>
-                <a:latin typeface="Microsoft JhengHei" pitchFamily="34" charset="-120"/>
-                <a:ea typeface="Microsoft JhengHei" pitchFamily="34" charset="-120"/>
-              </a:rPr>
-              <a:t>天天查考聖</a:t>
-            </a:r>
-            <a:r>
-              <a:rPr lang="zh-TW" altLang="en-US" sz="6400" b="1" dirty="0">
-                <a:solidFill>
-                  <a:srgbClr val="660033"/>
-                </a:solidFill>
-                <a:latin typeface="Microsoft JhengHei" pitchFamily="34" charset="-120"/>
-                <a:ea typeface="Microsoft JhengHei" pitchFamily="34" charset="-120"/>
-              </a:rPr>
-              <a:t>經  </a:t>
-            </a:r>
-            <a:r>
-              <a:rPr lang="zh-TW" altLang="en-US" sz="6400" b="1" dirty="0">
-                <a:solidFill>
-                  <a:srgbClr val="660033"/>
-                </a:solidFill>
-                <a:latin typeface="Microsoft JhengHei" pitchFamily="34" charset="-120"/>
-                <a:ea typeface="Microsoft JhengHei" pitchFamily="34" charset="-120"/>
-              </a:rPr>
-              <a:t>到主再臨</a:t>
+              <a:t>天天查考聖經  到主再臨</a:t>
             </a:r>
             <a:endParaRPr lang="en-US" altLang="zh-TW" sz="6400" b="1" dirty="0">
               <a:solidFill>
@@ -3402,7 +3319,7 @@
         <p:spPr>
           <a:xfrm>
             <a:off x="0" y="5061182"/>
-            <a:ext cx="12192000" cy="830997"/>
+            <a:ext cx="12192000" cy="646331"/>
           </a:xfrm>
           <a:prstGeom prst="rect">
             <a:avLst/>
@@ -3417,30 +3334,14 @@
           <a:p>
             <a:pPr algn="ctr"/>
             <a:r>
-              <a:rPr lang="en-US" sz="4800" b="1" dirty="0">
+              <a:rPr lang="en-US" sz="3600" b="1" dirty="0">
                 <a:solidFill>
                   <a:srgbClr val="660033"/>
                 </a:solidFill>
               </a:rPr>
-              <a:t>( </a:t>
-            </a:r>
-            <a:r>
-              <a:rPr lang="en-US" sz="4800" b="1" dirty="0" smtClean="0">
-                <a:solidFill>
-                  <a:srgbClr val="660033"/>
-                </a:solidFill>
-              </a:rPr>
-              <a:t>5 </a:t>
-            </a:r>
-            <a:r>
-              <a:rPr lang="en-US" sz="4800" b="1" dirty="0">
-                <a:solidFill>
-                  <a:srgbClr val="660033"/>
-                </a:solidFill>
-              </a:rPr>
-              <a:t>)</a:t>
-            </a:r>
-            <a:endParaRPr lang="vi-VN" sz="4800" b="1" dirty="0">
+              <a:t>( 5 / 5 )</a:t>
+            </a:r>
+            <a:endParaRPr lang="vi-VN" sz="3600" b="1" dirty="0">
               <a:solidFill>
                 <a:srgbClr val="660033"/>
               </a:solidFill>
@@ -3458,13 +3359,6 @@
   <p:clrMapOvr>
     <a:masterClrMapping/>
   </p:clrMapOvr>
-  <p:timing>
-    <p:tnLst>
-      <p:par>
-        <p:cTn id="1" dur="indefinite" restart="never" nodeType="tmRoot"/>
-      </p:par>
-    </p:tnLst>
-  </p:timing>
 </p:sld>
 </file>
 
@@ -3518,39 +3412,9 @@
                 <a:latin typeface="Microsoft JhengHei" pitchFamily="34" charset="-120"/>
                 <a:ea typeface="Microsoft JhengHei" pitchFamily="34" charset="-120"/>
               </a:rPr>
-              <a:t>我要你主我要</a:t>
-            </a:r>
-            <a:r>
-              <a:rPr lang="zh-TW" altLang="en-US" sz="6400" b="1" dirty="0" smtClean="0">
-                <a:solidFill>
-                  <a:srgbClr val="660033"/>
-                </a:solidFill>
-                <a:latin typeface="Microsoft JhengHei" pitchFamily="34" charset="-120"/>
-                <a:ea typeface="Microsoft JhengHei" pitchFamily="34" charset="-120"/>
-              </a:rPr>
-              <a:t>你  每</a:t>
-            </a:r>
-            <a:r>
-              <a:rPr lang="zh-TW" altLang="en-US" sz="6400" b="1" dirty="0">
-                <a:solidFill>
-                  <a:srgbClr val="660033"/>
-                </a:solidFill>
-                <a:latin typeface="Microsoft JhengHei" pitchFamily="34" charset="-120"/>
-                <a:ea typeface="Microsoft JhengHei" pitchFamily="34" charset="-120"/>
-              </a:rPr>
-              <a:t>時刻我要</a:t>
-            </a:r>
-            <a:r>
-              <a:rPr lang="zh-TW" altLang="en-US" sz="6400" b="1" dirty="0" smtClean="0">
-                <a:solidFill>
-                  <a:srgbClr val="660033"/>
-                </a:solidFill>
-                <a:latin typeface="Microsoft JhengHei" pitchFamily="34" charset="-120"/>
-                <a:ea typeface="Microsoft JhengHei" pitchFamily="34" charset="-120"/>
-              </a:rPr>
-              <a:t>你</a:t>
-            </a:r>
-            <a:endParaRPr lang="en-US" altLang="zh-TW" sz="6400" b="1" dirty="0" smtClean="0">
+              <a:t>我要祢主我要祢  每時刻我要祢</a:t>
+            </a:r>
+            <a:endParaRPr lang="en-US" altLang="zh-TW" sz="6400" b="1" dirty="0">
               <a:solidFill>
                 <a:srgbClr val="660033"/>
               </a:solidFill>
@@ -3570,20 +3434,10 @@
                 <a:latin typeface="Microsoft JhengHei" pitchFamily="34" charset="-120"/>
                 <a:ea typeface="Microsoft JhengHei" pitchFamily="34" charset="-120"/>
               </a:rPr>
-              <a:t>望主隨時施恩</a:t>
-            </a:r>
-            <a:r>
-              <a:rPr lang="zh-TW" altLang="en-US" sz="6400" b="1" dirty="0" smtClean="0">
-                <a:solidFill>
-                  <a:srgbClr val="660033"/>
-                </a:solidFill>
-                <a:latin typeface="Microsoft JhengHei" pitchFamily="34" charset="-120"/>
-                <a:ea typeface="Microsoft JhengHei" pitchFamily="34" charset="-120"/>
-              </a:rPr>
-              <a:t>惠</a:t>
-            </a:r>
-            <a:r>
-              <a:rPr lang="en-US" altLang="zh-TW" sz="6400" b="1" dirty="0" smtClean="0">
+              <a:t>望主隨時施恩惠</a:t>
+            </a:r>
+            <a:r>
+              <a:rPr lang="en-US" altLang="zh-TW" sz="6400" b="1" dirty="0">
                 <a:solidFill>
                   <a:srgbClr val="660033"/>
                 </a:solidFill>
@@ -3593,42 +3447,15 @@
               <a:t>  </a:t>
             </a:r>
             <a:r>
-              <a:rPr lang="zh-TW" altLang="en-US" sz="6400" b="1" dirty="0" smtClean="0">
+              <a:rPr lang="zh-TW" altLang="en-US" sz="6400" b="1" dirty="0">
                 <a:solidFill>
                   <a:srgbClr val="660033"/>
                 </a:solidFill>
                 <a:latin typeface="Microsoft JhengHei" pitchFamily="34" charset="-120"/>
                 <a:ea typeface="Microsoft JhengHei" pitchFamily="34" charset="-120"/>
               </a:rPr>
-              <a:t>我</a:t>
-            </a:r>
-            <a:r>
-              <a:rPr lang="zh-TW" altLang="en-US" sz="6400" b="1" dirty="0">
-                <a:solidFill>
-                  <a:srgbClr val="660033"/>
-                </a:solidFill>
-                <a:latin typeface="Microsoft JhengHei" pitchFamily="34" charset="-120"/>
-                <a:ea typeface="Microsoft JhengHei" pitchFamily="34" charset="-120"/>
-              </a:rPr>
-              <a:t>來就</a:t>
-            </a:r>
-            <a:r>
-              <a:rPr lang="zh-TW" altLang="en-US" sz="6400" b="1" dirty="0" smtClean="0">
-                <a:solidFill>
-                  <a:srgbClr val="660033"/>
-                </a:solidFill>
-                <a:latin typeface="Microsoft JhengHei" pitchFamily="34" charset="-120"/>
-                <a:ea typeface="Microsoft JhengHei" pitchFamily="34" charset="-120"/>
-              </a:rPr>
-              <a:t>你</a:t>
-            </a:r>
-            <a:endParaRPr lang="zh-TW" altLang="en-US" sz="6400" b="1" dirty="0">
-              <a:solidFill>
-                <a:srgbClr val="660033"/>
-              </a:solidFill>
-              <a:latin typeface="Microsoft JhengHei" pitchFamily="34" charset="-120"/>
-              <a:ea typeface="Microsoft JhengHei" pitchFamily="34" charset="-120"/>
-            </a:endParaRPr>
+              <a:t>我來就祢</a:t>
+            </a:r>
           </a:p>
         </p:txBody>
       </p:sp>
@@ -3642,13 +3469,6 @@
   <p:clrMapOvr>
     <a:masterClrMapping/>
   </p:clrMapOvr>
-  <p:timing>
-    <p:tnLst>
-      <p:par>
-        <p:cTn id="1" dur="indefinite" restart="never" nodeType="tmRoot"/>
-      </p:par>
-    </p:tnLst>
-  </p:timing>
 </p:sld>
 </file>
 
@@ -3695,15 +3515,20 @@
               <a:buNone/>
             </a:pPr>
             <a:r>
-              <a:rPr lang="zh-TW" altLang="en-US" sz="6400" b="1" dirty="0" smtClean="0">
+              <a:rPr lang="zh-TW" altLang="en-US" sz="6400" b="1" dirty="0">
                 <a:solidFill>
                   <a:srgbClr val="660033"/>
                 </a:solidFill>
                 <a:latin typeface="Microsoft JhengHei" pitchFamily="34" charset="-120"/>
                 <a:ea typeface="Microsoft JhengHei" pitchFamily="34" charset="-120"/>
               </a:rPr>
-              <a:t>我</a:t>
-            </a:r>
+              <a:t>我每時刻要祢  救主恩深</a:t>
+            </a:r>
+          </a:p>
+          <a:p>
+            <a:pPr algn="ctr">
+              <a:buNone/>
+            </a:pPr>
             <a:r>
               <a:rPr lang="zh-TW" altLang="en-US" sz="6400" b="1" dirty="0">
                 <a:solidFill>
@@ -3712,62 +3537,7 @@
                 <a:latin typeface="Microsoft JhengHei" pitchFamily="34" charset="-120"/>
                 <a:ea typeface="Microsoft JhengHei" pitchFamily="34" charset="-120"/>
               </a:rPr>
-              <a:t>每時刻</a:t>
-            </a:r>
-            <a:r>
-              <a:rPr lang="zh-TW" altLang="en-US" sz="6400" b="1" dirty="0" smtClean="0">
-                <a:solidFill>
-                  <a:srgbClr val="660033"/>
-                </a:solidFill>
-                <a:latin typeface="Microsoft JhengHei" pitchFamily="34" charset="-120"/>
-                <a:ea typeface="Microsoft JhengHei" pitchFamily="34" charset="-120"/>
-              </a:rPr>
-              <a:t>要你  救</a:t>
-            </a:r>
-            <a:r>
-              <a:rPr lang="zh-TW" altLang="en-US" sz="6400" b="1" dirty="0">
-                <a:solidFill>
-                  <a:srgbClr val="660033"/>
-                </a:solidFill>
-                <a:latin typeface="Microsoft JhengHei" pitchFamily="34" charset="-120"/>
-                <a:ea typeface="Microsoft JhengHei" pitchFamily="34" charset="-120"/>
-              </a:rPr>
-              <a:t>主恩深</a:t>
-            </a:r>
-          </a:p>
-          <a:p>
-            <a:pPr algn="ctr">
-              <a:buNone/>
-            </a:pPr>
-            <a:r>
-              <a:rPr lang="zh-TW" altLang="en-US" sz="6400" b="1" dirty="0">
-                <a:solidFill>
-                  <a:srgbClr val="660033"/>
-                </a:solidFill>
-                <a:latin typeface="Microsoft JhengHei" pitchFamily="34" charset="-120"/>
-                <a:ea typeface="Microsoft JhengHei" pitchFamily="34" charset="-120"/>
-              </a:rPr>
-              <a:t>誰有柔聲似你 </a:t>
-            </a:r>
-            <a:r>
-              <a:rPr lang="zh-TW" altLang="en-US" sz="6400" b="1" dirty="0" smtClean="0">
-                <a:solidFill>
-                  <a:srgbClr val="660033"/>
-                </a:solidFill>
-                <a:latin typeface="Microsoft JhengHei" pitchFamily="34" charset="-120"/>
-                <a:ea typeface="Microsoft JhengHei" pitchFamily="34" charset="-120"/>
-              </a:rPr>
-              <a:t> 足</a:t>
-            </a:r>
-            <a:r>
-              <a:rPr lang="zh-TW" altLang="en-US" sz="6400" b="1" dirty="0">
-                <a:solidFill>
-                  <a:srgbClr val="660033"/>
-                </a:solidFill>
-                <a:latin typeface="Microsoft JhengHei" pitchFamily="34" charset="-120"/>
-                <a:ea typeface="Microsoft JhengHei" pitchFamily="34" charset="-120"/>
-              </a:rPr>
-              <a:t>慰我心</a:t>
+              <a:t>誰有柔聲似祢  足慰我心</a:t>
             </a:r>
             <a:endParaRPr lang="en-US" altLang="zh-TW" sz="6400" b="1" dirty="0">
               <a:solidFill>
@@ -3788,7 +3558,7 @@
         <p:spPr>
           <a:xfrm>
             <a:off x="0" y="5061182"/>
-            <a:ext cx="12192000" cy="830997"/>
+            <a:ext cx="12192000" cy="646331"/>
           </a:xfrm>
           <a:prstGeom prst="rect">
             <a:avLst/>
@@ -3803,14 +3573,14 @@
           <a:p>
             <a:pPr algn="ctr"/>
             <a:r>
-              <a:rPr lang="en-US" sz="4800" b="1" dirty="0">
+              <a:rPr lang="en-US" sz="3600" b="1" dirty="0">
                 <a:solidFill>
                   <a:srgbClr val="660033"/>
                 </a:solidFill>
               </a:rPr>
-              <a:t>( 1 )</a:t>
-            </a:r>
-            <a:endParaRPr lang="vi-VN" sz="4800" b="1" dirty="0">
+              <a:t>( 1 / 5 )</a:t>
+            </a:r>
+            <a:endParaRPr lang="vi-VN" sz="3600" b="1" dirty="0">
               <a:solidFill>
                 <a:srgbClr val="660033"/>
               </a:solidFill>
@@ -3828,13 +3598,6 @@
   <p:clrMapOvr>
     <a:masterClrMapping/>
   </p:clrMapOvr>
-  <p:timing>
-    <p:tnLst>
-      <p:par>
-        <p:cTn id="1" dur="indefinite" restart="never" nodeType="tmRoot"/>
-      </p:par>
-    </p:tnLst>
-  </p:timing>
 </p:sld>
 </file>
 
@@ -3888,39 +3651,9 @@
                 <a:latin typeface="Microsoft JhengHei" pitchFamily="34" charset="-120"/>
                 <a:ea typeface="Microsoft JhengHei" pitchFamily="34" charset="-120"/>
               </a:rPr>
-              <a:t>我要你主我要</a:t>
-            </a:r>
-            <a:r>
-              <a:rPr lang="zh-TW" altLang="en-US" sz="6400" b="1" dirty="0" smtClean="0">
-                <a:solidFill>
-                  <a:srgbClr val="660033"/>
-                </a:solidFill>
-                <a:latin typeface="Microsoft JhengHei" pitchFamily="34" charset="-120"/>
-                <a:ea typeface="Microsoft JhengHei" pitchFamily="34" charset="-120"/>
-              </a:rPr>
-              <a:t>你  每</a:t>
-            </a:r>
-            <a:r>
-              <a:rPr lang="zh-TW" altLang="en-US" sz="6400" b="1" dirty="0">
-                <a:solidFill>
-                  <a:srgbClr val="660033"/>
-                </a:solidFill>
-                <a:latin typeface="Microsoft JhengHei" pitchFamily="34" charset="-120"/>
-                <a:ea typeface="Microsoft JhengHei" pitchFamily="34" charset="-120"/>
-              </a:rPr>
-              <a:t>時刻我要</a:t>
-            </a:r>
-            <a:r>
-              <a:rPr lang="zh-TW" altLang="en-US" sz="6400" b="1" dirty="0" smtClean="0">
-                <a:solidFill>
-                  <a:srgbClr val="660033"/>
-                </a:solidFill>
-                <a:latin typeface="Microsoft JhengHei" pitchFamily="34" charset="-120"/>
-                <a:ea typeface="Microsoft JhengHei" pitchFamily="34" charset="-120"/>
-              </a:rPr>
-              <a:t>你</a:t>
-            </a:r>
-            <a:endParaRPr lang="en-US" altLang="zh-TW" sz="6400" b="1" dirty="0" smtClean="0">
+              <a:t>我要祢主我要祢  每時刻我要祢</a:t>
+            </a:r>
+            <a:endParaRPr lang="en-US" altLang="zh-TW" sz="6400" b="1" dirty="0">
               <a:solidFill>
                 <a:srgbClr val="660033"/>
               </a:solidFill>
@@ -3940,20 +3673,10 @@
                 <a:latin typeface="Microsoft JhengHei" pitchFamily="34" charset="-120"/>
                 <a:ea typeface="Microsoft JhengHei" pitchFamily="34" charset="-120"/>
               </a:rPr>
-              <a:t>望主隨時施恩</a:t>
-            </a:r>
-            <a:r>
-              <a:rPr lang="zh-TW" altLang="en-US" sz="6400" b="1" dirty="0" smtClean="0">
-                <a:solidFill>
-                  <a:srgbClr val="660033"/>
-                </a:solidFill>
-                <a:latin typeface="Microsoft JhengHei" pitchFamily="34" charset="-120"/>
-                <a:ea typeface="Microsoft JhengHei" pitchFamily="34" charset="-120"/>
-              </a:rPr>
-              <a:t>惠</a:t>
-            </a:r>
-            <a:r>
-              <a:rPr lang="en-US" altLang="zh-TW" sz="6400" b="1" dirty="0" smtClean="0">
+              <a:t>望主隨時施恩惠</a:t>
+            </a:r>
+            <a:r>
+              <a:rPr lang="en-US" altLang="zh-TW" sz="6400" b="1" dirty="0">
                 <a:solidFill>
                   <a:srgbClr val="660033"/>
                 </a:solidFill>
@@ -3963,42 +3686,15 @@
               <a:t>  </a:t>
             </a:r>
             <a:r>
-              <a:rPr lang="zh-TW" altLang="en-US" sz="6400" b="1" dirty="0" smtClean="0">
+              <a:rPr lang="zh-TW" altLang="en-US" sz="6400" b="1" dirty="0">
                 <a:solidFill>
                   <a:srgbClr val="660033"/>
                 </a:solidFill>
                 <a:latin typeface="Microsoft JhengHei" pitchFamily="34" charset="-120"/>
                 <a:ea typeface="Microsoft JhengHei" pitchFamily="34" charset="-120"/>
               </a:rPr>
-              <a:t>我</a:t>
-            </a:r>
-            <a:r>
-              <a:rPr lang="zh-TW" altLang="en-US" sz="6400" b="1" dirty="0">
-                <a:solidFill>
-                  <a:srgbClr val="660033"/>
-                </a:solidFill>
-                <a:latin typeface="Microsoft JhengHei" pitchFamily="34" charset="-120"/>
-                <a:ea typeface="Microsoft JhengHei" pitchFamily="34" charset="-120"/>
-              </a:rPr>
-              <a:t>來就</a:t>
-            </a:r>
-            <a:r>
-              <a:rPr lang="zh-TW" altLang="en-US" sz="6400" b="1" dirty="0" smtClean="0">
-                <a:solidFill>
-                  <a:srgbClr val="660033"/>
-                </a:solidFill>
-                <a:latin typeface="Microsoft JhengHei" pitchFamily="34" charset="-120"/>
-                <a:ea typeface="Microsoft JhengHei" pitchFamily="34" charset="-120"/>
-              </a:rPr>
-              <a:t>你</a:t>
-            </a:r>
-            <a:endParaRPr lang="zh-TW" altLang="en-US" sz="6400" b="1" dirty="0">
-              <a:solidFill>
-                <a:srgbClr val="660033"/>
-              </a:solidFill>
-              <a:latin typeface="Microsoft JhengHei" pitchFamily="34" charset="-120"/>
-              <a:ea typeface="Microsoft JhengHei" pitchFamily="34" charset="-120"/>
-            </a:endParaRPr>
+              <a:t>我來就祢</a:t>
+            </a:r>
           </a:p>
         </p:txBody>
       </p:sp>
@@ -4012,13 +3708,6 @@
   <p:clrMapOvr>
     <a:masterClrMapping/>
   </p:clrMapOvr>
-  <p:timing>
-    <p:tnLst>
-      <p:par>
-        <p:cTn id="1" dur="indefinite" restart="never" nodeType="tmRoot"/>
-      </p:par>
-    </p:tnLst>
-  </p:timing>
 </p:sld>
 </file>
 
@@ -4072,8 +3761,13 @@
                 <a:latin typeface="Microsoft JhengHei" pitchFamily="34" charset="-120"/>
                 <a:ea typeface="Microsoft JhengHei" pitchFamily="34" charset="-120"/>
               </a:rPr>
-              <a:t>我每時刻</a:t>
-            </a:r>
+              <a:t>我每時刻要祢  與我親近</a:t>
+            </a:r>
+          </a:p>
+          <a:p>
+            <a:pPr algn="ctr">
+              <a:buNone/>
+            </a:pPr>
             <a:r>
               <a:rPr lang="zh-TW" altLang="en-US" sz="6400" b="1" dirty="0">
                 <a:solidFill>
@@ -4082,52 +3776,7 @@
                 <a:latin typeface="Microsoft JhengHei" pitchFamily="34" charset="-120"/>
                 <a:ea typeface="Microsoft JhengHei" pitchFamily="34" charset="-120"/>
               </a:rPr>
-              <a:t>要你  與</a:t>
-            </a:r>
-            <a:r>
-              <a:rPr lang="zh-TW" altLang="en-US" sz="6400" b="1" dirty="0">
-                <a:solidFill>
-                  <a:srgbClr val="660033"/>
-                </a:solidFill>
-                <a:latin typeface="Microsoft JhengHei" pitchFamily="34" charset="-120"/>
-                <a:ea typeface="Microsoft JhengHei" pitchFamily="34" charset="-120"/>
-              </a:rPr>
-              <a:t>我親近</a:t>
-            </a:r>
-          </a:p>
-          <a:p>
-            <a:pPr algn="ctr">
-              <a:buNone/>
-            </a:pPr>
-            <a:r>
-              <a:rPr lang="zh-TW" altLang="en-US" sz="6400" b="1" dirty="0">
-                <a:solidFill>
-                  <a:srgbClr val="660033"/>
-                </a:solidFill>
-                <a:latin typeface="Microsoft JhengHei" pitchFamily="34" charset="-120"/>
-                <a:ea typeface="Microsoft JhengHei" pitchFamily="34" charset="-120"/>
-              </a:rPr>
-              <a:t>魔鬼若來試探 </a:t>
-            </a:r>
-            <a:r>
-              <a:rPr lang="zh-TW" altLang="en-US" sz="6400" b="1" dirty="0">
-                <a:solidFill>
-                  <a:srgbClr val="660033"/>
-                </a:solidFill>
-                <a:latin typeface="Microsoft JhengHei" pitchFamily="34" charset="-120"/>
-                <a:ea typeface="Microsoft JhengHei" pitchFamily="34" charset="-120"/>
-              </a:rPr>
-              <a:t> 使</a:t>
-            </a:r>
-            <a:r>
-              <a:rPr lang="zh-TW" altLang="en-US" sz="6400" b="1" dirty="0">
-                <a:solidFill>
-                  <a:srgbClr val="660033"/>
-                </a:solidFill>
-                <a:latin typeface="Microsoft JhengHei" pitchFamily="34" charset="-120"/>
-                <a:ea typeface="Microsoft JhengHei" pitchFamily="34" charset="-120"/>
-              </a:rPr>
-              <a:t>我得勝</a:t>
+              <a:t>魔鬼若來試探  使我得勝</a:t>
             </a:r>
             <a:endParaRPr lang="en-US" altLang="zh-TW" sz="6400" b="1" dirty="0">
               <a:solidFill>
@@ -4148,7 +3797,7 @@
         <p:spPr>
           <a:xfrm>
             <a:off x="0" y="5061182"/>
-            <a:ext cx="12192000" cy="830997"/>
+            <a:ext cx="12192000" cy="646331"/>
           </a:xfrm>
           <a:prstGeom prst="rect">
             <a:avLst/>
@@ -4163,30 +3812,14 @@
           <a:p>
             <a:pPr algn="ctr"/>
             <a:r>
-              <a:rPr lang="en-US" sz="4800" b="1" dirty="0">
+              <a:rPr lang="en-US" sz="3600" b="1" dirty="0">
                 <a:solidFill>
                   <a:srgbClr val="660033"/>
                 </a:solidFill>
               </a:rPr>
-              <a:t>( </a:t>
-            </a:r>
-            <a:r>
-              <a:rPr lang="en-US" sz="4800" b="1" dirty="0" smtClean="0">
-                <a:solidFill>
-                  <a:srgbClr val="660033"/>
-                </a:solidFill>
-              </a:rPr>
-              <a:t>2 </a:t>
-            </a:r>
-            <a:r>
-              <a:rPr lang="en-US" sz="4800" b="1" dirty="0">
-                <a:solidFill>
-                  <a:srgbClr val="660033"/>
-                </a:solidFill>
-              </a:rPr>
-              <a:t>)</a:t>
-            </a:r>
-            <a:endParaRPr lang="vi-VN" sz="4800" b="1" dirty="0">
+              <a:t>( 2 / 5 )</a:t>
+            </a:r>
+            <a:endParaRPr lang="vi-VN" sz="3600" b="1" dirty="0">
               <a:solidFill>
                 <a:srgbClr val="660033"/>
               </a:solidFill>
@@ -4204,13 +3837,6 @@
   <p:clrMapOvr>
     <a:masterClrMapping/>
   </p:clrMapOvr>
-  <p:timing>
-    <p:tnLst>
-      <p:par>
-        <p:cTn id="1" dur="indefinite" restart="never" nodeType="tmRoot"/>
-      </p:par>
-    </p:tnLst>
-  </p:timing>
 </p:sld>
 </file>
 
@@ -4264,39 +3890,9 @@
                 <a:latin typeface="Microsoft JhengHei" pitchFamily="34" charset="-120"/>
                 <a:ea typeface="Microsoft JhengHei" pitchFamily="34" charset="-120"/>
               </a:rPr>
-              <a:t>我要你主我要</a:t>
-            </a:r>
-            <a:r>
-              <a:rPr lang="zh-TW" altLang="en-US" sz="6400" b="1" dirty="0" smtClean="0">
-                <a:solidFill>
-                  <a:srgbClr val="660033"/>
-                </a:solidFill>
-                <a:latin typeface="Microsoft JhengHei" pitchFamily="34" charset="-120"/>
-                <a:ea typeface="Microsoft JhengHei" pitchFamily="34" charset="-120"/>
-              </a:rPr>
-              <a:t>你  每</a:t>
-            </a:r>
-            <a:r>
-              <a:rPr lang="zh-TW" altLang="en-US" sz="6400" b="1" dirty="0">
-                <a:solidFill>
-                  <a:srgbClr val="660033"/>
-                </a:solidFill>
-                <a:latin typeface="Microsoft JhengHei" pitchFamily="34" charset="-120"/>
-                <a:ea typeface="Microsoft JhengHei" pitchFamily="34" charset="-120"/>
-              </a:rPr>
-              <a:t>時刻我要</a:t>
-            </a:r>
-            <a:r>
-              <a:rPr lang="zh-TW" altLang="en-US" sz="6400" b="1" dirty="0" smtClean="0">
-                <a:solidFill>
-                  <a:srgbClr val="660033"/>
-                </a:solidFill>
-                <a:latin typeface="Microsoft JhengHei" pitchFamily="34" charset="-120"/>
-                <a:ea typeface="Microsoft JhengHei" pitchFamily="34" charset="-120"/>
-              </a:rPr>
-              <a:t>你</a:t>
-            </a:r>
-            <a:endParaRPr lang="en-US" altLang="zh-TW" sz="6400" b="1" dirty="0" smtClean="0">
+              <a:t>我要祢主我要祢  每時刻我要祢</a:t>
+            </a:r>
+            <a:endParaRPr lang="en-US" altLang="zh-TW" sz="6400" b="1" dirty="0">
               <a:solidFill>
                 <a:srgbClr val="660033"/>
               </a:solidFill>
@@ -4316,20 +3912,10 @@
                 <a:latin typeface="Microsoft JhengHei" pitchFamily="34" charset="-120"/>
                 <a:ea typeface="Microsoft JhengHei" pitchFamily="34" charset="-120"/>
               </a:rPr>
-              <a:t>望主隨時施恩</a:t>
-            </a:r>
-            <a:r>
-              <a:rPr lang="zh-TW" altLang="en-US" sz="6400" b="1" dirty="0" smtClean="0">
-                <a:solidFill>
-                  <a:srgbClr val="660033"/>
-                </a:solidFill>
-                <a:latin typeface="Microsoft JhengHei" pitchFamily="34" charset="-120"/>
-                <a:ea typeface="Microsoft JhengHei" pitchFamily="34" charset="-120"/>
-              </a:rPr>
-              <a:t>惠</a:t>
-            </a:r>
-            <a:r>
-              <a:rPr lang="en-US" altLang="zh-TW" sz="6400" b="1" dirty="0" smtClean="0">
+              <a:t>望主隨時施恩惠</a:t>
+            </a:r>
+            <a:r>
+              <a:rPr lang="en-US" altLang="zh-TW" sz="6400" b="1" dirty="0">
                 <a:solidFill>
                   <a:srgbClr val="660033"/>
                 </a:solidFill>
@@ -4339,42 +3925,15 @@
               <a:t>  </a:t>
             </a:r>
             <a:r>
-              <a:rPr lang="zh-TW" altLang="en-US" sz="6400" b="1" dirty="0" smtClean="0">
+              <a:rPr lang="zh-TW" altLang="en-US" sz="6400" b="1" dirty="0">
                 <a:solidFill>
                   <a:srgbClr val="660033"/>
                 </a:solidFill>
                 <a:latin typeface="Microsoft JhengHei" pitchFamily="34" charset="-120"/>
                 <a:ea typeface="Microsoft JhengHei" pitchFamily="34" charset="-120"/>
               </a:rPr>
-              <a:t>我</a:t>
-            </a:r>
-            <a:r>
-              <a:rPr lang="zh-TW" altLang="en-US" sz="6400" b="1" dirty="0">
-                <a:solidFill>
-                  <a:srgbClr val="660033"/>
-                </a:solidFill>
-                <a:latin typeface="Microsoft JhengHei" pitchFamily="34" charset="-120"/>
-                <a:ea typeface="Microsoft JhengHei" pitchFamily="34" charset="-120"/>
-              </a:rPr>
-              <a:t>來就</a:t>
-            </a:r>
-            <a:r>
-              <a:rPr lang="zh-TW" altLang="en-US" sz="6400" b="1" dirty="0" smtClean="0">
-                <a:solidFill>
-                  <a:srgbClr val="660033"/>
-                </a:solidFill>
-                <a:latin typeface="Microsoft JhengHei" pitchFamily="34" charset="-120"/>
-                <a:ea typeface="Microsoft JhengHei" pitchFamily="34" charset="-120"/>
-              </a:rPr>
-              <a:t>你</a:t>
-            </a:r>
-            <a:endParaRPr lang="zh-TW" altLang="en-US" sz="6400" b="1" dirty="0">
-              <a:solidFill>
-                <a:srgbClr val="660033"/>
-              </a:solidFill>
-              <a:latin typeface="Microsoft JhengHei" pitchFamily="34" charset="-120"/>
-              <a:ea typeface="Microsoft JhengHei" pitchFamily="34" charset="-120"/>
-            </a:endParaRPr>
+              <a:t>我來就祢</a:t>
+            </a:r>
           </a:p>
         </p:txBody>
       </p:sp>
@@ -4388,13 +3947,6 @@
   <p:clrMapOvr>
     <a:masterClrMapping/>
   </p:clrMapOvr>
-  <p:timing>
-    <p:tnLst>
-      <p:par>
-        <p:cTn id="1" dur="indefinite" restart="never" nodeType="tmRoot"/>
-      </p:par>
-    </p:tnLst>
-  </p:timing>
 </p:sld>
 </file>
 
@@ -4448,8 +4000,13 @@
                 <a:latin typeface="Microsoft JhengHei" pitchFamily="34" charset="-120"/>
                 <a:ea typeface="Microsoft JhengHei" pitchFamily="34" charset="-120"/>
               </a:rPr>
-              <a:t>我每時刻</a:t>
-            </a:r>
+              <a:t>我每時刻要祢  或憂或樂</a:t>
+            </a:r>
+          </a:p>
+          <a:p>
+            <a:pPr algn="ctr">
+              <a:buNone/>
+            </a:pPr>
             <a:r>
               <a:rPr lang="zh-TW" altLang="en-US" sz="6400" b="1" dirty="0">
                 <a:solidFill>
@@ -4458,52 +4015,7 @@
                 <a:latin typeface="Microsoft JhengHei" pitchFamily="34" charset="-120"/>
                 <a:ea typeface="Microsoft JhengHei" pitchFamily="34" charset="-120"/>
               </a:rPr>
-              <a:t>要你  或</a:t>
-            </a:r>
-            <a:r>
-              <a:rPr lang="zh-TW" altLang="en-US" sz="6400" b="1" dirty="0">
-                <a:solidFill>
-                  <a:srgbClr val="660033"/>
-                </a:solidFill>
-                <a:latin typeface="Microsoft JhengHei" pitchFamily="34" charset="-120"/>
-                <a:ea typeface="Microsoft JhengHei" pitchFamily="34" charset="-120"/>
-              </a:rPr>
-              <a:t>憂或樂</a:t>
-            </a:r>
-          </a:p>
-          <a:p>
-            <a:pPr algn="ctr">
-              <a:buNone/>
-            </a:pPr>
-            <a:r>
-              <a:rPr lang="zh-TW" altLang="en-US" sz="6400" b="1" dirty="0">
-                <a:solidFill>
-                  <a:srgbClr val="660033"/>
-                </a:solidFill>
-                <a:latin typeface="Microsoft JhengHei" pitchFamily="34" charset="-120"/>
-                <a:ea typeface="Microsoft JhengHei" pitchFamily="34" charset="-120"/>
-              </a:rPr>
-              <a:t>主若不來同居 </a:t>
-            </a:r>
-            <a:r>
-              <a:rPr lang="zh-TW" altLang="en-US" sz="6400" b="1" dirty="0">
-                <a:solidFill>
-                  <a:srgbClr val="660033"/>
-                </a:solidFill>
-                <a:latin typeface="Microsoft JhengHei" pitchFamily="34" charset="-120"/>
-                <a:ea typeface="Microsoft JhengHei" pitchFamily="34" charset="-120"/>
-              </a:rPr>
-              <a:t> 我</a:t>
-            </a:r>
-            <a:r>
-              <a:rPr lang="zh-TW" altLang="en-US" sz="6400" b="1" dirty="0">
-                <a:solidFill>
-                  <a:srgbClr val="660033"/>
-                </a:solidFill>
-                <a:latin typeface="Microsoft JhengHei" pitchFamily="34" charset="-120"/>
-                <a:ea typeface="Microsoft JhengHei" pitchFamily="34" charset="-120"/>
-              </a:rPr>
-              <a:t>就枉活</a:t>
+              <a:t>主若不來同居  我就枉活</a:t>
             </a:r>
             <a:endParaRPr lang="en-US" altLang="zh-TW" sz="6400" b="1" dirty="0">
               <a:solidFill>
@@ -4524,7 +4036,7 @@
         <p:spPr>
           <a:xfrm>
             <a:off x="0" y="5061182"/>
-            <a:ext cx="12192000" cy="830997"/>
+            <a:ext cx="12192000" cy="646331"/>
           </a:xfrm>
           <a:prstGeom prst="rect">
             <a:avLst/>
@@ -4539,30 +4051,14 @@
           <a:p>
             <a:pPr algn="ctr"/>
             <a:r>
-              <a:rPr lang="en-US" sz="4800" b="1" dirty="0">
+              <a:rPr lang="en-US" sz="3600" b="1" dirty="0">
                 <a:solidFill>
                   <a:srgbClr val="660033"/>
                 </a:solidFill>
               </a:rPr>
-              <a:t>( </a:t>
-            </a:r>
-            <a:r>
-              <a:rPr lang="en-US" sz="4800" b="1" dirty="0" smtClean="0">
-                <a:solidFill>
-                  <a:srgbClr val="660033"/>
-                </a:solidFill>
-              </a:rPr>
-              <a:t>3 </a:t>
-            </a:r>
-            <a:r>
-              <a:rPr lang="en-US" sz="4800" b="1" dirty="0">
-                <a:solidFill>
-                  <a:srgbClr val="660033"/>
-                </a:solidFill>
-              </a:rPr>
-              <a:t>)</a:t>
-            </a:r>
-            <a:endParaRPr lang="vi-VN" sz="4800" b="1" dirty="0">
+              <a:t>( 3 / 5 )</a:t>
+            </a:r>
+            <a:endParaRPr lang="vi-VN" sz="3600" b="1" dirty="0">
               <a:solidFill>
                 <a:srgbClr val="660033"/>
               </a:solidFill>
@@ -4580,13 +4076,6 @@
   <p:clrMapOvr>
     <a:masterClrMapping/>
   </p:clrMapOvr>
-  <p:timing>
-    <p:tnLst>
-      <p:par>
-        <p:cTn id="1" dur="indefinite" restart="never" nodeType="tmRoot"/>
-      </p:par>
-    </p:tnLst>
-  </p:timing>
 </p:sld>
 </file>
 
@@ -4640,39 +4129,9 @@
                 <a:latin typeface="Microsoft JhengHei" pitchFamily="34" charset="-120"/>
                 <a:ea typeface="Microsoft JhengHei" pitchFamily="34" charset="-120"/>
               </a:rPr>
-              <a:t>我要你主我要</a:t>
-            </a:r>
-            <a:r>
-              <a:rPr lang="zh-TW" altLang="en-US" sz="6400" b="1" dirty="0" smtClean="0">
-                <a:solidFill>
-                  <a:srgbClr val="660033"/>
-                </a:solidFill>
-                <a:latin typeface="Microsoft JhengHei" pitchFamily="34" charset="-120"/>
-                <a:ea typeface="Microsoft JhengHei" pitchFamily="34" charset="-120"/>
-              </a:rPr>
-              <a:t>你  每</a:t>
-            </a:r>
-            <a:r>
-              <a:rPr lang="zh-TW" altLang="en-US" sz="6400" b="1" dirty="0">
-                <a:solidFill>
-                  <a:srgbClr val="660033"/>
-                </a:solidFill>
-                <a:latin typeface="Microsoft JhengHei" pitchFamily="34" charset="-120"/>
-                <a:ea typeface="Microsoft JhengHei" pitchFamily="34" charset="-120"/>
-              </a:rPr>
-              <a:t>時刻我要</a:t>
-            </a:r>
-            <a:r>
-              <a:rPr lang="zh-TW" altLang="en-US" sz="6400" b="1" dirty="0" smtClean="0">
-                <a:solidFill>
-                  <a:srgbClr val="660033"/>
-                </a:solidFill>
-                <a:latin typeface="Microsoft JhengHei" pitchFamily="34" charset="-120"/>
-                <a:ea typeface="Microsoft JhengHei" pitchFamily="34" charset="-120"/>
-              </a:rPr>
-              <a:t>你</a:t>
-            </a:r>
-            <a:endParaRPr lang="en-US" altLang="zh-TW" sz="6400" b="1" dirty="0" smtClean="0">
+              <a:t>我要祢主我要祢  每時刻我要祢</a:t>
+            </a:r>
+            <a:endParaRPr lang="en-US" altLang="zh-TW" sz="6400" b="1" dirty="0">
               <a:solidFill>
                 <a:srgbClr val="660033"/>
               </a:solidFill>
@@ -4692,20 +4151,10 @@
                 <a:latin typeface="Microsoft JhengHei" pitchFamily="34" charset="-120"/>
                 <a:ea typeface="Microsoft JhengHei" pitchFamily="34" charset="-120"/>
               </a:rPr>
-              <a:t>望主隨時施恩</a:t>
-            </a:r>
-            <a:r>
-              <a:rPr lang="zh-TW" altLang="en-US" sz="6400" b="1" dirty="0" smtClean="0">
-                <a:solidFill>
-                  <a:srgbClr val="660033"/>
-                </a:solidFill>
-                <a:latin typeface="Microsoft JhengHei" pitchFamily="34" charset="-120"/>
-                <a:ea typeface="Microsoft JhengHei" pitchFamily="34" charset="-120"/>
-              </a:rPr>
-              <a:t>惠</a:t>
-            </a:r>
-            <a:r>
-              <a:rPr lang="en-US" altLang="zh-TW" sz="6400" b="1" dirty="0" smtClean="0">
+              <a:t>望主隨時施恩惠</a:t>
+            </a:r>
+            <a:r>
+              <a:rPr lang="en-US" altLang="zh-TW" sz="6400" b="1" dirty="0">
                 <a:solidFill>
                   <a:srgbClr val="660033"/>
                 </a:solidFill>
@@ -4715,42 +4164,15 @@
               <a:t>  </a:t>
             </a:r>
             <a:r>
-              <a:rPr lang="zh-TW" altLang="en-US" sz="6400" b="1" dirty="0" smtClean="0">
+              <a:rPr lang="zh-TW" altLang="en-US" sz="6400" b="1" dirty="0">
                 <a:solidFill>
                   <a:srgbClr val="660033"/>
                 </a:solidFill>
                 <a:latin typeface="Microsoft JhengHei" pitchFamily="34" charset="-120"/>
                 <a:ea typeface="Microsoft JhengHei" pitchFamily="34" charset="-120"/>
               </a:rPr>
-              <a:t>我</a:t>
-            </a:r>
-            <a:r>
-              <a:rPr lang="zh-TW" altLang="en-US" sz="6400" b="1" dirty="0">
-                <a:solidFill>
-                  <a:srgbClr val="660033"/>
-                </a:solidFill>
-                <a:latin typeface="Microsoft JhengHei" pitchFamily="34" charset="-120"/>
-                <a:ea typeface="Microsoft JhengHei" pitchFamily="34" charset="-120"/>
-              </a:rPr>
-              <a:t>來就</a:t>
-            </a:r>
-            <a:r>
-              <a:rPr lang="zh-TW" altLang="en-US" sz="6400" b="1" dirty="0" smtClean="0">
-                <a:solidFill>
-                  <a:srgbClr val="660033"/>
-                </a:solidFill>
-                <a:latin typeface="Microsoft JhengHei" pitchFamily="34" charset="-120"/>
-                <a:ea typeface="Microsoft JhengHei" pitchFamily="34" charset="-120"/>
-              </a:rPr>
-              <a:t>你</a:t>
-            </a:r>
-            <a:endParaRPr lang="zh-TW" altLang="en-US" sz="6400" b="1" dirty="0">
-              <a:solidFill>
-                <a:srgbClr val="660033"/>
-              </a:solidFill>
-              <a:latin typeface="Microsoft JhengHei" pitchFamily="34" charset="-120"/>
-              <a:ea typeface="Microsoft JhengHei" pitchFamily="34" charset="-120"/>
-            </a:endParaRPr>
+              <a:t>我來就祢</a:t>
+            </a:r>
           </a:p>
         </p:txBody>
       </p:sp>
@@ -4764,13 +4186,6 @@
   <p:clrMapOvr>
     <a:masterClrMapping/>
   </p:clrMapOvr>
-  <p:timing>
-    <p:tnLst>
-      <p:par>
-        <p:cTn id="1" dur="indefinite" restart="never" nodeType="tmRoot"/>
-      </p:par>
-    </p:tnLst>
-  </p:timing>
 </p:sld>
 </file>
 
@@ -4824,8 +4239,13 @@
                 <a:latin typeface="Microsoft JhengHei" pitchFamily="34" charset="-120"/>
                 <a:ea typeface="Microsoft JhengHei" pitchFamily="34" charset="-120"/>
               </a:rPr>
-              <a:t>我每時刻</a:t>
-            </a:r>
+              <a:t>我每時刻要祢  賜我恩言</a:t>
+            </a:r>
+          </a:p>
+          <a:p>
+            <a:pPr algn="ctr">
+              <a:buNone/>
+            </a:pPr>
             <a:r>
               <a:rPr lang="zh-TW" altLang="en-US" sz="6400" b="1" dirty="0">
                 <a:solidFill>
@@ -4834,52 +4254,7 @@
                 <a:latin typeface="Microsoft JhengHei" pitchFamily="34" charset="-120"/>
                 <a:ea typeface="Microsoft JhengHei" pitchFamily="34" charset="-120"/>
               </a:rPr>
-              <a:t>要你  賜</a:t>
-            </a:r>
-            <a:r>
-              <a:rPr lang="zh-TW" altLang="en-US" sz="6400" b="1" dirty="0">
-                <a:solidFill>
-                  <a:srgbClr val="660033"/>
-                </a:solidFill>
-                <a:latin typeface="Microsoft JhengHei" pitchFamily="34" charset="-120"/>
-                <a:ea typeface="Microsoft JhengHei" pitchFamily="34" charset="-120"/>
-              </a:rPr>
-              <a:t>我恩言</a:t>
-            </a:r>
-          </a:p>
-          <a:p>
-            <a:pPr algn="ctr">
-              <a:buNone/>
-            </a:pPr>
-            <a:r>
-              <a:rPr lang="zh-TW" altLang="en-US" sz="6400" b="1" dirty="0">
-                <a:solidFill>
-                  <a:srgbClr val="660033"/>
-                </a:solidFill>
-                <a:latin typeface="Microsoft JhengHei" pitchFamily="34" charset="-120"/>
-                <a:ea typeface="Microsoft JhengHei" pitchFamily="34" charset="-120"/>
-              </a:rPr>
-              <a:t>願主寶貝應許 </a:t>
-            </a:r>
-            <a:r>
-              <a:rPr lang="zh-TW" altLang="en-US" sz="6400" b="1" dirty="0">
-                <a:solidFill>
-                  <a:srgbClr val="660033"/>
-                </a:solidFill>
-                <a:latin typeface="Microsoft JhengHei" pitchFamily="34" charset="-120"/>
-                <a:ea typeface="Microsoft JhengHei" pitchFamily="34" charset="-120"/>
-              </a:rPr>
-              <a:t> 於</a:t>
-            </a:r>
-            <a:r>
-              <a:rPr lang="zh-TW" altLang="en-US" sz="6400" b="1" dirty="0">
-                <a:solidFill>
-                  <a:srgbClr val="660033"/>
-                </a:solidFill>
-                <a:latin typeface="Microsoft JhengHei" pitchFamily="34" charset="-120"/>
-                <a:ea typeface="Microsoft JhengHei" pitchFamily="34" charset="-120"/>
-              </a:rPr>
-              <a:t>我成全</a:t>
+              <a:t>願主寶貝應許  於我成全</a:t>
             </a:r>
             <a:endParaRPr lang="en-US" altLang="zh-TW" sz="6400" b="1" dirty="0">
               <a:solidFill>
@@ -4900,7 +4275,7 @@
         <p:spPr>
           <a:xfrm>
             <a:off x="0" y="5061182"/>
-            <a:ext cx="12192000" cy="830997"/>
+            <a:ext cx="12192000" cy="646331"/>
           </a:xfrm>
           <a:prstGeom prst="rect">
             <a:avLst/>
@@ -4915,30 +4290,14 @@
           <a:p>
             <a:pPr algn="ctr"/>
             <a:r>
-              <a:rPr lang="en-US" sz="4800" b="1" dirty="0">
+              <a:rPr lang="en-US" sz="3600" b="1" dirty="0">
                 <a:solidFill>
                   <a:srgbClr val="660033"/>
                 </a:solidFill>
               </a:rPr>
-              <a:t>( </a:t>
-            </a:r>
-            <a:r>
-              <a:rPr lang="en-US" sz="4800" b="1" dirty="0" smtClean="0">
-                <a:solidFill>
-                  <a:srgbClr val="660033"/>
-                </a:solidFill>
-              </a:rPr>
-              <a:t>4 </a:t>
-            </a:r>
-            <a:r>
-              <a:rPr lang="en-US" sz="4800" b="1" dirty="0">
-                <a:solidFill>
-                  <a:srgbClr val="660033"/>
-                </a:solidFill>
-              </a:rPr>
-              <a:t>)</a:t>
-            </a:r>
-            <a:endParaRPr lang="vi-VN" sz="4800" b="1" dirty="0">
+              <a:t>( 4 / 5 )</a:t>
+            </a:r>
+            <a:endParaRPr lang="vi-VN" sz="3600" b="1" dirty="0">
               <a:solidFill>
                 <a:srgbClr val="660033"/>
               </a:solidFill>
@@ -4956,13 +4315,6 @@
   <p:clrMapOvr>
     <a:masterClrMapping/>
   </p:clrMapOvr>
-  <p:timing>
-    <p:tnLst>
-      <p:par>
-        <p:cTn id="1" dur="indefinite" restart="never" nodeType="tmRoot"/>
-      </p:par>
-    </p:tnLst>
-  </p:timing>
 </p:sld>
 </file>
 
@@ -5016,39 +4368,9 @@
                 <a:latin typeface="Microsoft JhengHei" pitchFamily="34" charset="-120"/>
                 <a:ea typeface="Microsoft JhengHei" pitchFamily="34" charset="-120"/>
               </a:rPr>
-              <a:t>我要你主我要</a:t>
-            </a:r>
-            <a:r>
-              <a:rPr lang="zh-TW" altLang="en-US" sz="6400" b="1" dirty="0" smtClean="0">
-                <a:solidFill>
-                  <a:srgbClr val="660033"/>
-                </a:solidFill>
-                <a:latin typeface="Microsoft JhengHei" pitchFamily="34" charset="-120"/>
-                <a:ea typeface="Microsoft JhengHei" pitchFamily="34" charset="-120"/>
-              </a:rPr>
-              <a:t>你  每</a:t>
-            </a:r>
-            <a:r>
-              <a:rPr lang="zh-TW" altLang="en-US" sz="6400" b="1" dirty="0">
-                <a:solidFill>
-                  <a:srgbClr val="660033"/>
-                </a:solidFill>
-                <a:latin typeface="Microsoft JhengHei" pitchFamily="34" charset="-120"/>
-                <a:ea typeface="Microsoft JhengHei" pitchFamily="34" charset="-120"/>
-              </a:rPr>
-              <a:t>時刻我要</a:t>
-            </a:r>
-            <a:r>
-              <a:rPr lang="zh-TW" altLang="en-US" sz="6400" b="1" dirty="0" smtClean="0">
-                <a:solidFill>
-                  <a:srgbClr val="660033"/>
-                </a:solidFill>
-                <a:latin typeface="Microsoft JhengHei" pitchFamily="34" charset="-120"/>
-                <a:ea typeface="Microsoft JhengHei" pitchFamily="34" charset="-120"/>
-              </a:rPr>
-              <a:t>你</a:t>
-            </a:r>
-            <a:endParaRPr lang="en-US" altLang="zh-TW" sz="6400" b="1" dirty="0" smtClean="0">
+              <a:t>我要祢主我要祢  每時刻我要祢</a:t>
+            </a:r>
+            <a:endParaRPr lang="en-US" altLang="zh-TW" sz="6400" b="1" dirty="0">
               <a:solidFill>
                 <a:srgbClr val="660033"/>
               </a:solidFill>
@@ -5068,20 +4390,10 @@
                 <a:latin typeface="Microsoft JhengHei" pitchFamily="34" charset="-120"/>
                 <a:ea typeface="Microsoft JhengHei" pitchFamily="34" charset="-120"/>
               </a:rPr>
-              <a:t>望主隨時施恩</a:t>
-            </a:r>
-            <a:r>
-              <a:rPr lang="zh-TW" altLang="en-US" sz="6400" b="1" dirty="0" smtClean="0">
-                <a:solidFill>
-                  <a:srgbClr val="660033"/>
-                </a:solidFill>
-                <a:latin typeface="Microsoft JhengHei" pitchFamily="34" charset="-120"/>
-                <a:ea typeface="Microsoft JhengHei" pitchFamily="34" charset="-120"/>
-              </a:rPr>
-              <a:t>惠</a:t>
-            </a:r>
-            <a:r>
-              <a:rPr lang="en-US" altLang="zh-TW" sz="6400" b="1" dirty="0" smtClean="0">
+              <a:t>望主隨時施恩惠</a:t>
+            </a:r>
+            <a:r>
+              <a:rPr lang="en-US" altLang="zh-TW" sz="6400" b="1" dirty="0">
                 <a:solidFill>
                   <a:srgbClr val="660033"/>
                 </a:solidFill>
@@ -5091,42 +4403,15 @@
               <a:t>  </a:t>
             </a:r>
             <a:r>
-              <a:rPr lang="zh-TW" altLang="en-US" sz="6400" b="1" dirty="0" smtClean="0">
+              <a:rPr lang="zh-TW" altLang="en-US" sz="6400" b="1" dirty="0">
                 <a:solidFill>
                   <a:srgbClr val="660033"/>
                 </a:solidFill>
                 <a:latin typeface="Microsoft JhengHei" pitchFamily="34" charset="-120"/>
                 <a:ea typeface="Microsoft JhengHei" pitchFamily="34" charset="-120"/>
               </a:rPr>
-              <a:t>我</a:t>
-            </a:r>
-            <a:r>
-              <a:rPr lang="zh-TW" altLang="en-US" sz="6400" b="1" dirty="0">
-                <a:solidFill>
-                  <a:srgbClr val="660033"/>
-                </a:solidFill>
-                <a:latin typeface="Microsoft JhengHei" pitchFamily="34" charset="-120"/>
-                <a:ea typeface="Microsoft JhengHei" pitchFamily="34" charset="-120"/>
-              </a:rPr>
-              <a:t>來就</a:t>
-            </a:r>
-            <a:r>
-              <a:rPr lang="zh-TW" altLang="en-US" sz="6400" b="1" dirty="0" smtClean="0">
-                <a:solidFill>
-                  <a:srgbClr val="660033"/>
-                </a:solidFill>
-                <a:latin typeface="Microsoft JhengHei" pitchFamily="34" charset="-120"/>
-                <a:ea typeface="Microsoft JhengHei" pitchFamily="34" charset="-120"/>
-              </a:rPr>
-              <a:t>你</a:t>
-            </a:r>
-            <a:endParaRPr lang="zh-TW" altLang="en-US" sz="6400" b="1" dirty="0">
-              <a:solidFill>
-                <a:srgbClr val="660033"/>
-              </a:solidFill>
-              <a:latin typeface="Microsoft JhengHei" pitchFamily="34" charset="-120"/>
-              <a:ea typeface="Microsoft JhengHei" pitchFamily="34" charset="-120"/>
-            </a:endParaRPr>
+              <a:t>我來就祢</a:t>
+            </a:r>
           </a:p>
         </p:txBody>
       </p:sp>
@@ -5140,13 +4425,6 @@
   <p:clrMapOvr>
     <a:masterClrMapping/>
   </p:clrMapOvr>
-  <p:timing>
-    <p:tnLst>
-      <p:par>
-        <p:cTn id="1" dur="indefinite" restart="never" nodeType="tmRoot"/>
-      </p:par>
-    </p:tnLst>
-  </p:timing>
 </p:sld>
 </file>
 
